--- a/fusion_model_structure.pptx
+++ b/fusion_model_structure.pptx
@@ -5,9 +5,9 @@
     <p:sldMasterId id="2147483648" r:id="rId1"/>
   </p:sldMasterIdLst>
   <p:sldIdLst>
-    <p:sldId id="256" r:id="rId7"/>
+    <p:sldId id="256" r:id="rId2"/>
   </p:sldIdLst>
-  <p:sldSz cx="12191695" cy="6858000" type="screen4x3"/>
+  <p:sldSz cx="12192000" cy="6858000"/>
   <p:notesSz cx="6858000" cy="9144000"/>
   <p:defaultTextStyle>
     <a:defPPr>
@@ -104,6 +104,22 @@
       </a:defRPr>
     </a:lvl9pPr>
   </p:defaultTextStyle>
+  <p:extLst>
+    <p:ext uri="{EFAFB233-063F-42B5-8137-9DF3F51BA10A}">
+      <p15:sldGuideLst xmlns:p15="http://schemas.microsoft.com/office/powerpoint/2012/main">
+        <p15:guide id="1" orient="horz" pos="2160">
+          <p15:clr>
+            <a:srgbClr val="A4A3A4"/>
+          </p15:clr>
+        </p15:guide>
+        <p15:guide id="2" pos="2880">
+          <p15:clr>
+            <a:srgbClr val="A4A3A4"/>
+          </p15:clr>
+        </p15:guide>
+      </p15:sldGuideLst>
+    </p:ext>
+  </p:extLst>
 </p:presentation>
 </file>
 
@@ -145,10 +161,9 @@
           <a:lstStyle/>
           <a:p>
             <a:r>
-              <a:rPr lang="en-US" smtClean="0"/>
+              <a:rPr lang="en-US"/>
               <a:t>Click to edit Master title style</a:t>
             </a:r>
-            <a:endParaRPr lang="en-US"/>
           </a:p>
         </p:txBody>
       </p:sp>
@@ -264,10 +279,9 @@
           </a:lstStyle>
           <a:p>
             <a:r>
-              <a:rPr lang="en-US" smtClean="0"/>
+              <a:rPr lang="en-US"/>
               <a:t>Click to edit Master subtitle style</a:t>
             </a:r>
-            <a:endParaRPr lang="en-US"/>
           </a:p>
         </p:txBody>
       </p:sp>
@@ -288,7 +302,7 @@
           <a:p>
             <a:fld id="{5BCAD085-E8A6-8845-BD4E-CB4CCA059FC4}" type="datetimeFigureOut">
               <a:rPr lang="en-US" smtClean="0"/>
-              <a:t>1/27/13</a:t>
+              <a:t>10/7/2026</a:t>
             </a:fld>
             <a:endParaRPr lang="en-US"/>
           </a:p>
@@ -382,10 +396,9 @@
           <a:lstStyle/>
           <a:p>
             <a:r>
-              <a:rPr lang="en-US" smtClean="0"/>
+              <a:rPr lang="en-US"/>
               <a:t>Click to edit Master title style</a:t>
             </a:r>
-            <a:endParaRPr lang="en-US"/>
           </a:p>
         </p:txBody>
       </p:sp>
@@ -406,38 +419,37 @@
           <a:p>
             <a:pPr lvl="0"/>
             <a:r>
-              <a:rPr lang="en-US" smtClean="0"/>
+              <a:rPr lang="en-US"/>
               <a:t>Click to edit Master text styles</a:t>
             </a:r>
           </a:p>
           <a:p>
             <a:pPr lvl="1"/>
             <a:r>
-              <a:rPr lang="en-US" smtClean="0"/>
+              <a:rPr lang="en-US"/>
               <a:t>Second level</a:t>
             </a:r>
           </a:p>
           <a:p>
             <a:pPr lvl="2"/>
             <a:r>
-              <a:rPr lang="en-US" smtClean="0"/>
+              <a:rPr lang="en-US"/>
               <a:t>Third level</a:t>
             </a:r>
           </a:p>
           <a:p>
             <a:pPr lvl="3"/>
             <a:r>
-              <a:rPr lang="en-US" smtClean="0"/>
+              <a:rPr lang="en-US"/>
               <a:t>Fourth level</a:t>
             </a:r>
           </a:p>
           <a:p>
             <a:pPr lvl="4"/>
             <a:r>
-              <a:rPr lang="en-US" smtClean="0"/>
+              <a:rPr lang="en-US"/>
               <a:t>Fifth level</a:t>
             </a:r>
-            <a:endParaRPr lang="en-US"/>
           </a:p>
         </p:txBody>
       </p:sp>
@@ -458,7 +470,7 @@
           <a:p>
             <a:fld id="{5BCAD085-E8A6-8845-BD4E-CB4CCA059FC4}" type="datetimeFigureOut">
               <a:rPr lang="en-US" smtClean="0"/>
-              <a:t>1/27/13</a:t>
+              <a:t>10/7/2026</a:t>
             </a:fld>
             <a:endParaRPr lang="en-US"/>
           </a:p>
@@ -557,10 +569,9 @@
           <a:lstStyle/>
           <a:p>
             <a:r>
-              <a:rPr lang="en-US" smtClean="0"/>
+              <a:rPr lang="en-US"/>
               <a:t>Click to edit Master title style</a:t>
             </a:r>
-            <a:endParaRPr lang="en-US"/>
           </a:p>
         </p:txBody>
       </p:sp>
@@ -586,38 +597,37 @@
           <a:p>
             <a:pPr lvl="0"/>
             <a:r>
-              <a:rPr lang="en-US" smtClean="0"/>
+              <a:rPr lang="en-US"/>
               <a:t>Click to edit Master text styles</a:t>
             </a:r>
           </a:p>
           <a:p>
             <a:pPr lvl="1"/>
             <a:r>
-              <a:rPr lang="en-US" smtClean="0"/>
+              <a:rPr lang="en-US"/>
               <a:t>Second level</a:t>
             </a:r>
           </a:p>
           <a:p>
             <a:pPr lvl="2"/>
             <a:r>
-              <a:rPr lang="en-US" smtClean="0"/>
+              <a:rPr lang="en-US"/>
               <a:t>Third level</a:t>
             </a:r>
           </a:p>
           <a:p>
             <a:pPr lvl="3"/>
             <a:r>
-              <a:rPr lang="en-US" smtClean="0"/>
+              <a:rPr lang="en-US"/>
               <a:t>Fourth level</a:t>
             </a:r>
           </a:p>
           <a:p>
             <a:pPr lvl="4"/>
             <a:r>
-              <a:rPr lang="en-US" smtClean="0"/>
+              <a:rPr lang="en-US"/>
               <a:t>Fifth level</a:t>
             </a:r>
-            <a:endParaRPr lang="en-US"/>
           </a:p>
         </p:txBody>
       </p:sp>
@@ -638,7 +648,7 @@
           <a:p>
             <a:fld id="{5BCAD085-E8A6-8845-BD4E-CB4CCA059FC4}" type="datetimeFigureOut">
               <a:rPr lang="en-US" smtClean="0"/>
-              <a:t>1/27/13</a:t>
+              <a:t>10/7/2026</a:t>
             </a:fld>
             <a:endParaRPr lang="en-US"/>
           </a:p>
@@ -732,10 +742,9 @@
           <a:lstStyle/>
           <a:p>
             <a:r>
-              <a:rPr lang="en-US" smtClean="0"/>
+              <a:rPr lang="en-US"/>
               <a:t>Click to edit Master title style</a:t>
             </a:r>
-            <a:endParaRPr lang="en-US"/>
           </a:p>
         </p:txBody>
       </p:sp>
@@ -756,38 +765,37 @@
           <a:p>
             <a:pPr lvl="0"/>
             <a:r>
-              <a:rPr lang="en-US" smtClean="0"/>
+              <a:rPr lang="en-US"/>
               <a:t>Click to edit Master text styles</a:t>
             </a:r>
           </a:p>
           <a:p>
             <a:pPr lvl="1"/>
             <a:r>
-              <a:rPr lang="en-US" smtClean="0"/>
+              <a:rPr lang="en-US"/>
               <a:t>Second level</a:t>
             </a:r>
           </a:p>
           <a:p>
             <a:pPr lvl="2"/>
             <a:r>
-              <a:rPr lang="en-US" smtClean="0"/>
+              <a:rPr lang="en-US"/>
               <a:t>Third level</a:t>
             </a:r>
           </a:p>
           <a:p>
             <a:pPr lvl="3"/>
             <a:r>
-              <a:rPr lang="en-US" smtClean="0"/>
+              <a:rPr lang="en-US"/>
               <a:t>Fourth level</a:t>
             </a:r>
           </a:p>
           <a:p>
             <a:pPr lvl="4"/>
             <a:r>
-              <a:rPr lang="en-US" smtClean="0"/>
+              <a:rPr lang="en-US"/>
               <a:t>Fifth level</a:t>
             </a:r>
-            <a:endParaRPr lang="en-US"/>
           </a:p>
         </p:txBody>
       </p:sp>
@@ -808,7 +816,7 @@
           <a:p>
             <a:fld id="{5BCAD085-E8A6-8845-BD4E-CB4CCA059FC4}" type="datetimeFigureOut">
               <a:rPr lang="en-US" smtClean="0"/>
-              <a:t>1/27/13</a:t>
+              <a:t>10/7/2026</a:t>
             </a:fld>
             <a:endParaRPr lang="en-US"/>
           </a:p>
@@ -911,10 +919,9 @@
           </a:lstStyle>
           <a:p>
             <a:r>
-              <a:rPr lang="en-US" smtClean="0"/>
+              <a:rPr lang="en-US"/>
               <a:t>Click to edit Master title style</a:t>
             </a:r>
-            <a:endParaRPr lang="en-US"/>
           </a:p>
         </p:txBody>
       </p:sp>
@@ -1031,7 +1038,7 @@
           <a:p>
             <a:pPr lvl="0"/>
             <a:r>
-              <a:rPr lang="en-US" smtClean="0"/>
+              <a:rPr lang="en-US"/>
               <a:t>Click to edit Master text styles</a:t>
             </a:r>
           </a:p>
@@ -1054,7 +1061,7 @@
           <a:p>
             <a:fld id="{5BCAD085-E8A6-8845-BD4E-CB4CCA059FC4}" type="datetimeFigureOut">
               <a:rPr lang="en-US" smtClean="0"/>
-              <a:t>1/27/13</a:t>
+              <a:t>10/7/2026</a:t>
             </a:fld>
             <a:endParaRPr lang="en-US"/>
           </a:p>
@@ -1148,10 +1155,9 @@
           <a:lstStyle/>
           <a:p>
             <a:r>
-              <a:rPr lang="en-US" smtClean="0"/>
+              <a:rPr lang="en-US"/>
               <a:t>Click to edit Master title style</a:t>
             </a:r>
-            <a:endParaRPr lang="en-US"/>
           </a:p>
         </p:txBody>
       </p:sp>
@@ -1205,38 +1211,37 @@
           <a:p>
             <a:pPr lvl="0"/>
             <a:r>
-              <a:rPr lang="en-US" smtClean="0"/>
+              <a:rPr lang="en-US"/>
               <a:t>Click to edit Master text styles</a:t>
             </a:r>
           </a:p>
           <a:p>
             <a:pPr lvl="1"/>
             <a:r>
-              <a:rPr lang="en-US" smtClean="0"/>
+              <a:rPr lang="en-US"/>
               <a:t>Second level</a:t>
             </a:r>
           </a:p>
           <a:p>
             <a:pPr lvl="2"/>
             <a:r>
-              <a:rPr lang="en-US" smtClean="0"/>
+              <a:rPr lang="en-US"/>
               <a:t>Third level</a:t>
             </a:r>
           </a:p>
           <a:p>
             <a:pPr lvl="3"/>
             <a:r>
-              <a:rPr lang="en-US" smtClean="0"/>
+              <a:rPr lang="en-US"/>
               <a:t>Fourth level</a:t>
             </a:r>
           </a:p>
           <a:p>
             <a:pPr lvl="4"/>
             <a:r>
-              <a:rPr lang="en-US" smtClean="0"/>
+              <a:rPr lang="en-US"/>
               <a:t>Fifth level</a:t>
             </a:r>
-            <a:endParaRPr lang="en-US"/>
           </a:p>
         </p:txBody>
       </p:sp>
@@ -1290,38 +1295,37 @@
           <a:p>
             <a:pPr lvl="0"/>
             <a:r>
-              <a:rPr lang="en-US" smtClean="0"/>
+              <a:rPr lang="en-US"/>
               <a:t>Click to edit Master text styles</a:t>
             </a:r>
           </a:p>
           <a:p>
             <a:pPr lvl="1"/>
             <a:r>
-              <a:rPr lang="en-US" smtClean="0"/>
+              <a:rPr lang="en-US"/>
               <a:t>Second level</a:t>
             </a:r>
           </a:p>
           <a:p>
             <a:pPr lvl="2"/>
             <a:r>
-              <a:rPr lang="en-US" smtClean="0"/>
+              <a:rPr lang="en-US"/>
               <a:t>Third level</a:t>
             </a:r>
           </a:p>
           <a:p>
             <a:pPr lvl="3"/>
             <a:r>
-              <a:rPr lang="en-US" smtClean="0"/>
+              <a:rPr lang="en-US"/>
               <a:t>Fourth level</a:t>
             </a:r>
           </a:p>
           <a:p>
             <a:pPr lvl="4"/>
             <a:r>
-              <a:rPr lang="en-US" smtClean="0"/>
+              <a:rPr lang="en-US"/>
               <a:t>Fifth level</a:t>
             </a:r>
-            <a:endParaRPr lang="en-US"/>
           </a:p>
         </p:txBody>
       </p:sp>
@@ -1342,7 +1346,7 @@
           <a:p>
             <a:fld id="{5BCAD085-E8A6-8845-BD4E-CB4CCA059FC4}" type="datetimeFigureOut">
               <a:rPr lang="en-US" smtClean="0"/>
-              <a:t>1/27/13</a:t>
+              <a:t>10/7/2026</a:t>
             </a:fld>
             <a:endParaRPr lang="en-US"/>
           </a:p>
@@ -1440,10 +1444,9 @@
           </a:lstStyle>
           <a:p>
             <a:r>
-              <a:rPr lang="en-US" smtClean="0"/>
+              <a:rPr lang="en-US"/>
               <a:t>Click to edit Master title style</a:t>
             </a:r>
-            <a:endParaRPr lang="en-US"/>
           </a:p>
         </p:txBody>
       </p:sp>
@@ -1506,7 +1509,7 @@
           <a:p>
             <a:pPr lvl="0"/>
             <a:r>
-              <a:rPr lang="en-US" smtClean="0"/>
+              <a:rPr lang="en-US"/>
               <a:t>Click to edit Master text styles</a:t>
             </a:r>
           </a:p>
@@ -1562,38 +1565,37 @@
           <a:p>
             <a:pPr lvl="0"/>
             <a:r>
-              <a:rPr lang="en-US" smtClean="0"/>
+              <a:rPr lang="en-US"/>
               <a:t>Click to edit Master text styles</a:t>
             </a:r>
           </a:p>
           <a:p>
             <a:pPr lvl="1"/>
             <a:r>
-              <a:rPr lang="en-US" smtClean="0"/>
+              <a:rPr lang="en-US"/>
               <a:t>Second level</a:t>
             </a:r>
           </a:p>
           <a:p>
             <a:pPr lvl="2"/>
             <a:r>
-              <a:rPr lang="en-US" smtClean="0"/>
+              <a:rPr lang="en-US"/>
               <a:t>Third level</a:t>
             </a:r>
           </a:p>
           <a:p>
             <a:pPr lvl="3"/>
             <a:r>
-              <a:rPr lang="en-US" smtClean="0"/>
+              <a:rPr lang="en-US"/>
               <a:t>Fourth level</a:t>
             </a:r>
           </a:p>
           <a:p>
             <a:pPr lvl="4"/>
             <a:r>
-              <a:rPr lang="en-US" smtClean="0"/>
+              <a:rPr lang="en-US"/>
               <a:t>Fifth level</a:t>
             </a:r>
-            <a:endParaRPr lang="en-US"/>
           </a:p>
         </p:txBody>
       </p:sp>
@@ -1656,7 +1658,7 @@
           <a:p>
             <a:pPr lvl="0"/>
             <a:r>
-              <a:rPr lang="en-US" smtClean="0"/>
+              <a:rPr lang="en-US"/>
               <a:t>Click to edit Master text styles</a:t>
             </a:r>
           </a:p>
@@ -1712,38 +1714,37 @@
           <a:p>
             <a:pPr lvl="0"/>
             <a:r>
-              <a:rPr lang="en-US" smtClean="0"/>
+              <a:rPr lang="en-US"/>
               <a:t>Click to edit Master text styles</a:t>
             </a:r>
           </a:p>
           <a:p>
             <a:pPr lvl="1"/>
             <a:r>
-              <a:rPr lang="en-US" smtClean="0"/>
+              <a:rPr lang="en-US"/>
               <a:t>Second level</a:t>
             </a:r>
           </a:p>
           <a:p>
             <a:pPr lvl="2"/>
             <a:r>
-              <a:rPr lang="en-US" smtClean="0"/>
+              <a:rPr lang="en-US"/>
               <a:t>Third level</a:t>
             </a:r>
           </a:p>
           <a:p>
             <a:pPr lvl="3"/>
             <a:r>
-              <a:rPr lang="en-US" smtClean="0"/>
+              <a:rPr lang="en-US"/>
               <a:t>Fourth level</a:t>
             </a:r>
           </a:p>
           <a:p>
             <a:pPr lvl="4"/>
             <a:r>
-              <a:rPr lang="en-US" smtClean="0"/>
+              <a:rPr lang="en-US"/>
               <a:t>Fifth level</a:t>
             </a:r>
-            <a:endParaRPr lang="en-US"/>
           </a:p>
         </p:txBody>
       </p:sp>
@@ -1764,7 +1765,7 @@
           <a:p>
             <a:fld id="{5BCAD085-E8A6-8845-BD4E-CB4CCA059FC4}" type="datetimeFigureOut">
               <a:rPr lang="en-US" smtClean="0"/>
-              <a:t>1/27/13</a:t>
+              <a:t>10/7/2026</a:t>
             </a:fld>
             <a:endParaRPr lang="en-US"/>
           </a:p>
@@ -1858,10 +1859,9 @@
           <a:lstStyle/>
           <a:p>
             <a:r>
-              <a:rPr lang="en-US" smtClean="0"/>
+              <a:rPr lang="en-US"/>
               <a:t>Click to edit Master title style</a:t>
             </a:r>
-            <a:endParaRPr lang="en-US"/>
           </a:p>
         </p:txBody>
       </p:sp>
@@ -1882,7 +1882,7 @@
           <a:p>
             <a:fld id="{5BCAD085-E8A6-8845-BD4E-CB4CCA059FC4}" type="datetimeFigureOut">
               <a:rPr lang="en-US" smtClean="0"/>
-              <a:t>1/27/13</a:t>
+              <a:t>10/7/2026</a:t>
             </a:fld>
             <a:endParaRPr lang="en-US"/>
           </a:p>
@@ -1977,7 +1977,7 @@
           <a:p>
             <a:fld id="{5BCAD085-E8A6-8845-BD4E-CB4CCA059FC4}" type="datetimeFigureOut">
               <a:rPr lang="en-US" smtClean="0"/>
-              <a:t>1/27/13</a:t>
+              <a:t>10/7/2026</a:t>
             </a:fld>
             <a:endParaRPr lang="en-US"/>
           </a:p>
@@ -2080,10 +2080,9 @@
           </a:lstStyle>
           <a:p>
             <a:r>
-              <a:rPr lang="en-US" smtClean="0"/>
+              <a:rPr lang="en-US"/>
               <a:t>Click to edit Master title style</a:t>
             </a:r>
-            <a:endParaRPr lang="en-US"/>
           </a:p>
         </p:txBody>
       </p:sp>
@@ -2137,38 +2136,37 @@
           <a:p>
             <a:pPr lvl="0"/>
             <a:r>
-              <a:rPr lang="en-US" smtClean="0"/>
+              <a:rPr lang="en-US"/>
               <a:t>Click to edit Master text styles</a:t>
             </a:r>
           </a:p>
           <a:p>
             <a:pPr lvl="1"/>
             <a:r>
-              <a:rPr lang="en-US" smtClean="0"/>
+              <a:rPr lang="en-US"/>
               <a:t>Second level</a:t>
             </a:r>
           </a:p>
           <a:p>
             <a:pPr lvl="2"/>
             <a:r>
-              <a:rPr lang="en-US" smtClean="0"/>
+              <a:rPr lang="en-US"/>
               <a:t>Third level</a:t>
             </a:r>
           </a:p>
           <a:p>
             <a:pPr lvl="3"/>
             <a:r>
-              <a:rPr lang="en-US" smtClean="0"/>
+              <a:rPr lang="en-US"/>
               <a:t>Fourth level</a:t>
             </a:r>
           </a:p>
           <a:p>
             <a:pPr lvl="4"/>
             <a:r>
-              <a:rPr lang="en-US" smtClean="0"/>
+              <a:rPr lang="en-US"/>
               <a:t>Fifth level</a:t>
             </a:r>
-            <a:endParaRPr lang="en-US"/>
           </a:p>
         </p:txBody>
       </p:sp>
@@ -2231,7 +2229,7 @@
           <a:p>
             <a:pPr lvl="0"/>
             <a:r>
-              <a:rPr lang="en-US" smtClean="0"/>
+              <a:rPr lang="en-US"/>
               <a:t>Click to edit Master text styles</a:t>
             </a:r>
           </a:p>
@@ -2254,7 +2252,7 @@
           <a:p>
             <a:fld id="{5BCAD085-E8A6-8845-BD4E-CB4CCA059FC4}" type="datetimeFigureOut">
               <a:rPr lang="en-US" smtClean="0"/>
-              <a:t>1/27/13</a:t>
+              <a:t>10/7/2026</a:t>
             </a:fld>
             <a:endParaRPr lang="en-US"/>
           </a:p>
@@ -2357,10 +2355,9 @@
           </a:lstStyle>
           <a:p>
             <a:r>
-              <a:rPr lang="en-US" smtClean="0"/>
+              <a:rPr lang="en-US"/>
               <a:t>Click to edit Master title style</a:t>
             </a:r>
-            <a:endParaRPr lang="en-US"/>
           </a:p>
         </p:txBody>
       </p:sp>
@@ -2484,7 +2481,7 @@
           <a:p>
             <a:pPr lvl="0"/>
             <a:r>
-              <a:rPr lang="en-US" smtClean="0"/>
+              <a:rPr lang="en-US"/>
               <a:t>Click to edit Master text styles</a:t>
             </a:r>
           </a:p>
@@ -2507,7 +2504,7 @@
           <a:p>
             <a:fld id="{5BCAD085-E8A6-8845-BD4E-CB4CCA059FC4}" type="datetimeFigureOut">
               <a:rPr lang="en-US" smtClean="0"/>
-              <a:t>1/27/13</a:t>
+              <a:t>10/7/2026</a:t>
             </a:fld>
             <a:endParaRPr lang="en-US"/>
           </a:p>
@@ -2616,10 +2613,9 @@
           <a:lstStyle/>
           <a:p>
             <a:r>
-              <a:rPr lang="en-US" smtClean="0"/>
+              <a:rPr lang="en-US"/>
               <a:t>Click to edit Master title style</a:t>
             </a:r>
-            <a:endParaRPr lang="en-US"/>
           </a:p>
         </p:txBody>
       </p:sp>
@@ -2650,38 +2646,37 @@
           <a:p>
             <a:pPr lvl="0"/>
             <a:r>
-              <a:rPr lang="en-US" smtClean="0"/>
+              <a:rPr lang="en-US"/>
               <a:t>Click to edit Master text styles</a:t>
             </a:r>
           </a:p>
           <a:p>
             <a:pPr lvl="1"/>
             <a:r>
-              <a:rPr lang="en-US" smtClean="0"/>
+              <a:rPr lang="en-US"/>
               <a:t>Second level</a:t>
             </a:r>
           </a:p>
           <a:p>
             <a:pPr lvl="2"/>
             <a:r>
-              <a:rPr lang="en-US" smtClean="0"/>
+              <a:rPr lang="en-US"/>
               <a:t>Third level</a:t>
             </a:r>
           </a:p>
           <a:p>
             <a:pPr lvl="3"/>
             <a:r>
-              <a:rPr lang="en-US" smtClean="0"/>
+              <a:rPr lang="en-US"/>
               <a:t>Fourth level</a:t>
             </a:r>
           </a:p>
           <a:p>
             <a:pPr lvl="4"/>
             <a:r>
-              <a:rPr lang="en-US" smtClean="0"/>
+              <a:rPr lang="en-US"/>
               <a:t>Fifth level</a:t>
             </a:r>
-            <a:endParaRPr lang="en-US"/>
           </a:p>
         </p:txBody>
       </p:sp>
@@ -2720,7 +2715,7 @@
           <a:p>
             <a:fld id="{5BCAD085-E8A6-8845-BD4E-CB4CCA059FC4}" type="datetimeFigureOut">
               <a:rPr lang="en-US" smtClean="0"/>
-              <a:t>1/27/13</a:t>
+              <a:t>10/7/2026</a:t>
             </a:fld>
             <a:endParaRPr lang="en-US"/>
           </a:p>
@@ -3079,7 +3074,7 @@
 </file>
 
 <file path=ppt/slides/slide1.xml><?xml version="1.0" encoding="utf-8"?>
-<p:sld xmlns:a="http://schemas.openxmlformats.org/drawingml/2006/main" xmlns:p="http://schemas.openxmlformats.org/presentationml/2006/main" xmlns:r="http://schemas.openxmlformats.org/officeDocument/2006/relationships">
+<p:sld xmlns:a="http://schemas.openxmlformats.org/drawingml/2006/main" xmlns:r="http://schemas.openxmlformats.org/officeDocument/2006/relationships" xmlns:p="http://schemas.openxmlformats.org/presentationml/2006/main">
   <p:cSld>
     <p:spTree>
       <p:nvGrpSpPr>
@@ -3087,42 +3082,14 @@
         <p:cNvGrpSpPr/>
         <p:nvPr/>
       </p:nvGrpSpPr>
-      <p:grpSpPr/>
-      <p:sp>
-        <p:nvSpPr>
-          <p:cNvPr id="2" name="TextBox 1"/>
-          <p:cNvSpPr txBox="1"/>
-          <p:nvPr/>
-        </p:nvSpPr>
-        <p:spPr>
-          <a:xfrm>
-            <a:off x="365760" y="274320"/>
-            <a:ext cx="11430000" cy="411480"/>
-          </a:xfrm>
-          <a:prstGeom prst="rect">
-            <a:avLst/>
-          </a:prstGeom>
-          <a:noFill/>
-        </p:spPr>
-        <p:txBody>
-          <a:bodyPr wrap="square" anchor="ctr" lIns="0" rIns="0" tIns="0" bIns="0">
-            <a:spAutoFit/>
-          </a:bodyPr>
-          <a:lstStyle/>
-          <a:p>
-            <a:pPr algn="l"/>
-            <a:r>
-              <a:rPr sz="2000" b="1">
-                <a:solidFill>
-                  <a:srgbClr val="45464A"/>
-                </a:solidFill>
-                <a:latin typeface="Arial"/>
-              </a:rPr>
-              <a:t>Multimodal Transformer with same-time cross-modal fusion</a:t>
-            </a:r>
-          </a:p>
-        </p:txBody>
-      </p:sp>
+      <p:grpSpPr>
+        <a:xfrm>
+          <a:off x="0" y="0"/>
+          <a:ext cx="0" cy="0"/>
+          <a:chOff x="0" y="0"/>
+          <a:chExt cx="0" cy="0"/>
+        </a:xfrm>
+      </p:grpSpPr>
       <p:sp>
         <p:nvSpPr>
           <p:cNvPr id="3" name="Rounded Rectangle 2"/>
@@ -3168,6 +3135,7 @@
           <a:lstStyle/>
           <a:p>
             <a:pPr algn="ctr"/>
+            <a:endParaRPr sz="3200"/>
           </a:p>
         </p:txBody>
       </p:sp>
@@ -3179,8 +3147,8 @@
         </p:nvSpPr>
         <p:spPr>
           <a:xfrm>
-            <a:off x="5897880" y="914400"/>
-            <a:ext cx="3017520" cy="274320"/>
+            <a:off x="5897880" y="928450"/>
+            <a:ext cx="3017520" cy="246221"/>
           </a:xfrm>
           <a:prstGeom prst="rect">
             <a:avLst/>
@@ -3188,68 +3156,92 @@
           <a:noFill/>
         </p:spPr>
         <p:txBody>
-          <a:bodyPr wrap="square" anchor="ctr" lIns="0" rIns="0" tIns="0" bIns="0">
+          <a:bodyPr wrap="square" lIns="0" tIns="0" rIns="0" bIns="0" anchor="ctr">
             <a:spAutoFit/>
           </a:bodyPr>
           <a:lstStyle/>
           <a:p>
             <a:pPr algn="ctr"/>
             <a:r>
-              <a:rPr sz="1200" b="1">
+              <a:rPr lang="en-US" altLang="zh-CN" sz="1600" b="1" dirty="0">
                 <a:solidFill>
                   <a:srgbClr val="45464A"/>
                 </a:solidFill>
                 <a:latin typeface="Arial"/>
               </a:rPr>
-              <a:t>Same-time cross-modal fusion</a:t>
-            </a:r>
-          </a:p>
-        </p:txBody>
-      </p:sp>
-      <p:sp>
-        <p:nvSpPr>
-          <p:cNvPr id="5" name="TextBox 4"/>
-          <p:cNvSpPr txBox="1"/>
-          <p:nvPr/>
-        </p:nvSpPr>
-        <p:spPr>
-          <a:xfrm>
-            <a:off x="5897880" y="3886200"/>
-            <a:ext cx="3017520" cy="411480"/>
-          </a:xfrm>
-          <a:prstGeom prst="rect">
-            <a:avLst/>
-          </a:prstGeom>
-          <a:noFill/>
-        </p:spPr>
-        <p:txBody>
-          <a:bodyPr wrap="square" anchor="ctr" lIns="0" rIns="0" tIns="0" bIns="0">
-            <a:spAutoFit/>
-          </a:bodyPr>
-          <a:lstStyle/>
-          <a:p>
-            <a:pPr algn="ctr"/>
-            <a:r>
-              <a:rPr sz="1000" b="0">
+              <a:t>C</a:t>
+            </a:r>
+            <a:r>
+              <a:rPr sz="1600" b="1" dirty="0">
                 <a:solidFill>
                   <a:srgbClr val="45464A"/>
                 </a:solidFill>
                 <a:latin typeface="Arial"/>
               </a:rPr>
-              <a:t>Multi-head attention (4 heads) inside each frame</a:t>
-            </a:r>
-          </a:p>
-          <a:p>
-            <a:pPr algn="ctr"/>
-            <a:r>
-              <a:rPr sz="1000" b="0">
+              <a:t>ross-modal fusion</a:t>
+            </a:r>
+          </a:p>
+        </p:txBody>
+      </p:sp>
+      <p:sp>
+        <p:nvSpPr>
+          <p:cNvPr id="5" name="TextBox 4"/>
+          <p:cNvSpPr txBox="1"/>
+          <p:nvPr/>
+        </p:nvSpPr>
+        <p:spPr>
+          <a:xfrm>
+            <a:off x="5897880" y="3876497"/>
+            <a:ext cx="3017520" cy="430887"/>
+          </a:xfrm>
+          <a:prstGeom prst="rect">
+            <a:avLst/>
+          </a:prstGeom>
+          <a:noFill/>
+        </p:spPr>
+        <p:txBody>
+          <a:bodyPr wrap="square" lIns="0" tIns="0" rIns="0" bIns="0" anchor="ctr">
+            <a:spAutoFit/>
+          </a:bodyPr>
+          <a:lstStyle/>
+          <a:p>
+            <a:pPr algn="ctr"/>
+            <a:r>
+              <a:rPr sz="1400" b="0" dirty="0">
                 <a:solidFill>
                   <a:srgbClr val="45464A"/>
                 </a:solidFill>
                 <a:latin typeface="Arial"/>
               </a:rPr>
-              <a:t>Add &amp; LayerNorm</a:t>
-            </a:r>
+              <a:t>Multi-head attention</a:t>
+            </a:r>
+          </a:p>
+          <a:p>
+            <a:pPr algn="ctr"/>
+            <a:r>
+              <a:rPr sz="1400" b="0" dirty="0">
+                <a:solidFill>
+                  <a:srgbClr val="45464A"/>
+                </a:solidFill>
+                <a:latin typeface="Arial"/>
+              </a:rPr>
+              <a:t>Add &amp; </a:t>
+            </a:r>
+            <a:r>
+              <a:rPr sz="1400" b="0" dirty="0" err="1">
+                <a:solidFill>
+                  <a:srgbClr val="45464A"/>
+                </a:solidFill>
+                <a:latin typeface="Arial"/>
+              </a:rPr>
+              <a:t>LayerNorm</a:t>
+            </a:r>
+            <a:endParaRPr sz="1400" b="0" dirty="0">
+              <a:solidFill>
+                <a:srgbClr val="45464A"/>
+              </a:solidFill>
+              <a:latin typeface="Arial"/>
+            </a:endParaRPr>
           </a:p>
         </p:txBody>
       </p:sp>
@@ -3261,8 +3253,8 @@
         </p:nvSpPr>
         <p:spPr>
           <a:xfrm>
-            <a:off x="6080760" y="1243584"/>
-            <a:ext cx="530352" cy="219456"/>
+            <a:off x="6080760" y="1260979"/>
+            <a:ext cx="530352" cy="184666"/>
           </a:xfrm>
           <a:prstGeom prst="rect">
             <a:avLst/>
@@ -3270,14 +3262,14 @@
           <a:noFill/>
         </p:spPr>
         <p:txBody>
-          <a:bodyPr wrap="square" anchor="ctr" lIns="0" rIns="0" tIns="0" bIns="0">
+          <a:bodyPr wrap="square" lIns="0" tIns="0" rIns="0" bIns="0" anchor="ctr">
             <a:spAutoFit/>
           </a:bodyPr>
           <a:lstStyle/>
           <a:p>
             <a:pPr algn="ctr"/>
             <a:r>
-              <a:rPr sz="1000" b="0">
+              <a:rPr sz="1200" b="0" dirty="0">
                 <a:solidFill>
                   <a:srgbClr val="7C7D80"/>
                 </a:solidFill>
@@ -3333,6 +3325,7 @@
           <a:lstStyle/>
           <a:p>
             <a:pPr algn="ctr"/>
+            <a:endParaRPr sz="3200"/>
           </a:p>
         </p:txBody>
       </p:sp>
@@ -3416,6 +3409,7 @@
           <a:lstStyle/>
           <a:p>
             <a:pPr algn="ctr"/>
+            <a:endParaRPr sz="3200"/>
           </a:p>
         </p:txBody>
       </p:sp>
@@ -3462,6 +3456,7 @@
           <a:lstStyle/>
           <a:p>
             <a:pPr algn="ctr"/>
+            <a:endParaRPr sz="3200"/>
           </a:p>
         </p:txBody>
       </p:sp>
@@ -3473,8 +3468,8 @@
         </p:nvSpPr>
         <p:spPr>
           <a:xfrm>
-            <a:off x="6611112" y="1243584"/>
-            <a:ext cx="530352" cy="219456"/>
+            <a:off x="6611112" y="1260979"/>
+            <a:ext cx="530352" cy="184666"/>
           </a:xfrm>
           <a:prstGeom prst="rect">
             <a:avLst/>
@@ -3482,14 +3477,14 @@
           <a:noFill/>
         </p:spPr>
         <p:txBody>
-          <a:bodyPr wrap="square" anchor="ctr" lIns="0" rIns="0" tIns="0" bIns="0">
+          <a:bodyPr wrap="square" lIns="0" tIns="0" rIns="0" bIns="0" anchor="ctr">
             <a:spAutoFit/>
           </a:bodyPr>
           <a:lstStyle/>
           <a:p>
             <a:pPr algn="ctr"/>
             <a:r>
-              <a:rPr sz="1000" b="0">
+              <a:rPr sz="1200" b="0" dirty="0">
                 <a:solidFill>
                   <a:srgbClr val="7C7D80"/>
                 </a:solidFill>
@@ -3545,6 +3540,7 @@
           <a:lstStyle/>
           <a:p>
             <a:pPr algn="ctr"/>
+            <a:endParaRPr sz="3200"/>
           </a:p>
         </p:txBody>
       </p:sp>
@@ -3628,6 +3624,7 @@
           <a:lstStyle/>
           <a:p>
             <a:pPr algn="ctr"/>
+            <a:endParaRPr sz="3200"/>
           </a:p>
         </p:txBody>
       </p:sp>
@@ -3674,6 +3671,7 @@
           <a:lstStyle/>
           <a:p>
             <a:pPr algn="ctr"/>
+            <a:endParaRPr sz="3200"/>
           </a:p>
         </p:txBody>
       </p:sp>
@@ -3685,8 +3683,8 @@
         </p:nvSpPr>
         <p:spPr>
           <a:xfrm>
-            <a:off x="7141464" y="1243584"/>
-            <a:ext cx="530352" cy="219456"/>
+            <a:off x="7141464" y="1260979"/>
+            <a:ext cx="530352" cy="184666"/>
           </a:xfrm>
           <a:prstGeom prst="rect">
             <a:avLst/>
@@ -3694,14 +3692,14 @@
           <a:noFill/>
         </p:spPr>
         <p:txBody>
-          <a:bodyPr wrap="square" anchor="ctr" lIns="0" rIns="0" tIns="0" bIns="0">
+          <a:bodyPr wrap="square" lIns="0" tIns="0" rIns="0" bIns="0" anchor="ctr">
             <a:spAutoFit/>
           </a:bodyPr>
           <a:lstStyle/>
           <a:p>
             <a:pPr algn="ctr"/>
             <a:r>
-              <a:rPr sz="1000" b="0">
+              <a:rPr sz="1200" b="0" dirty="0">
                 <a:solidFill>
                   <a:srgbClr val="7C7D80"/>
                 </a:solidFill>
@@ -3757,6 +3755,7 @@
           <a:lstStyle/>
           <a:p>
             <a:pPr algn="ctr"/>
+            <a:endParaRPr sz="3200"/>
           </a:p>
         </p:txBody>
       </p:sp>
@@ -3840,6 +3839,7 @@
           <a:lstStyle/>
           <a:p>
             <a:pPr algn="ctr"/>
+            <a:endParaRPr sz="3200"/>
           </a:p>
         </p:txBody>
       </p:sp>
@@ -3886,6 +3886,7 @@
           <a:lstStyle/>
           <a:p>
             <a:pPr algn="ctr"/>
+            <a:endParaRPr sz="3200"/>
           </a:p>
         </p:txBody>
       </p:sp>
@@ -3932,6 +3933,7 @@
           <a:lstStyle/>
           <a:p>
             <a:pPr algn="ctr"/>
+            <a:endParaRPr sz="3200"/>
           </a:p>
         </p:txBody>
       </p:sp>
@@ -3978,6 +3980,7 @@
           <a:lstStyle/>
           <a:p>
             <a:pPr algn="ctr"/>
+            <a:endParaRPr sz="3200"/>
           </a:p>
         </p:txBody>
       </p:sp>
@@ -4024,6 +4027,7 @@
           <a:lstStyle/>
           <a:p>
             <a:pPr algn="ctr"/>
+            <a:endParaRPr sz="3200"/>
           </a:p>
         </p:txBody>
       </p:sp>
@@ -4070,6 +4074,7 @@
           <a:lstStyle/>
           <a:p>
             <a:pPr algn="ctr"/>
+            <a:endParaRPr sz="3200"/>
           </a:p>
         </p:txBody>
       </p:sp>
@@ -4116,6 +4121,7 @@
           <a:lstStyle/>
           <a:p>
             <a:pPr algn="ctr"/>
+            <a:endParaRPr sz="3200"/>
           </a:p>
         </p:txBody>
       </p:sp>
@@ -4162,6 +4168,7 @@
           <a:lstStyle/>
           <a:p>
             <a:pPr algn="ctr"/>
+            <a:endParaRPr sz="3200"/>
           </a:p>
         </p:txBody>
       </p:sp>
@@ -4173,8 +4180,8 @@
         </p:nvSpPr>
         <p:spPr>
           <a:xfrm>
-            <a:off x="8202168" y="1243584"/>
-            <a:ext cx="530352" cy="219456"/>
+            <a:off x="8202168" y="1260979"/>
+            <a:ext cx="530352" cy="184666"/>
           </a:xfrm>
           <a:prstGeom prst="rect">
             <a:avLst/>
@@ -4182,14 +4189,14 @@
           <a:noFill/>
         </p:spPr>
         <p:txBody>
-          <a:bodyPr wrap="square" anchor="ctr" lIns="0" rIns="0" tIns="0" bIns="0">
+          <a:bodyPr wrap="square" lIns="0" tIns="0" rIns="0" bIns="0" anchor="ctr">
             <a:spAutoFit/>
           </a:bodyPr>
           <a:lstStyle/>
           <a:p>
             <a:pPr algn="ctr"/>
             <a:r>
-              <a:rPr sz="1000" b="0">
+              <a:rPr sz="1200" b="0">
                 <a:solidFill>
                   <a:srgbClr val="7C7D80"/>
                 </a:solidFill>
@@ -4245,6 +4252,7 @@
           <a:lstStyle/>
           <a:p>
             <a:pPr algn="ctr"/>
+            <a:endParaRPr sz="3200"/>
           </a:p>
         </p:txBody>
       </p:sp>
@@ -4328,6 +4336,7 @@
           <a:lstStyle/>
           <a:p>
             <a:pPr algn="ctr"/>
+            <a:endParaRPr sz="3200"/>
           </a:p>
         </p:txBody>
       </p:sp>
@@ -4374,6 +4383,7 @@
           <a:lstStyle/>
           <a:p>
             <a:pPr algn="ctr"/>
+            <a:endParaRPr sz="3200"/>
           </a:p>
         </p:txBody>
       </p:sp>
@@ -4385,8 +4395,8 @@
         </p:nvSpPr>
         <p:spPr>
           <a:xfrm>
-            <a:off x="365760" y="1133855"/>
-            <a:ext cx="1463040" cy="256032"/>
+            <a:off x="365760" y="1138761"/>
+            <a:ext cx="1463040" cy="246221"/>
           </a:xfrm>
           <a:prstGeom prst="rect">
             <a:avLst/>
@@ -4394,14 +4404,14 @@
           <a:noFill/>
         </p:spPr>
         <p:txBody>
-          <a:bodyPr wrap="square" anchor="ctr" lIns="0" rIns="0" tIns="0" bIns="0">
+          <a:bodyPr wrap="square" lIns="0" tIns="0" rIns="0" bIns="0" anchor="ctr">
             <a:spAutoFit/>
           </a:bodyPr>
           <a:lstStyle/>
           <a:p>
             <a:pPr algn="ctr"/>
             <a:r>
-              <a:rPr sz="1200" b="1">
+              <a:rPr sz="1600" b="1" dirty="0">
                 <a:solidFill>
                   <a:srgbClr val="45464A"/>
                 </a:solidFill>
@@ -4455,6 +4465,7 @@
           <a:lstStyle/>
           <a:p>
             <a:pPr algn="ctr"/>
+            <a:endParaRPr sz="3200"/>
           </a:p>
         </p:txBody>
       </p:sp>
@@ -4501,6 +4512,7 @@
           <a:lstStyle/>
           <a:p>
             <a:pPr algn="ctr"/>
+            <a:endParaRPr sz="3200"/>
           </a:p>
         </p:txBody>
       </p:sp>
@@ -4547,6 +4559,7 @@
           <a:lstStyle/>
           <a:p>
             <a:pPr algn="ctr"/>
+            <a:endParaRPr sz="3200"/>
           </a:p>
         </p:txBody>
       </p:sp>
@@ -4593,6 +4606,7 @@
           <a:lstStyle/>
           <a:p>
             <a:pPr algn="ctr"/>
+            <a:endParaRPr sz="3200"/>
           </a:p>
         </p:txBody>
       </p:sp>
@@ -4639,6 +4653,7 @@
           <a:lstStyle/>
           <a:p>
             <a:pPr algn="ctr"/>
+            <a:endParaRPr sz="3200"/>
           </a:p>
         </p:txBody>
       </p:sp>
@@ -4685,6 +4700,7 @@
           <a:lstStyle/>
           <a:p>
             <a:pPr algn="ctr"/>
+            <a:endParaRPr sz="3200"/>
           </a:p>
         </p:txBody>
       </p:sp>
@@ -4731,6 +4747,7 @@
           <a:lstStyle/>
           <a:p>
             <a:pPr algn="ctr"/>
+            <a:endParaRPr sz="3200"/>
           </a:p>
         </p:txBody>
       </p:sp>
@@ -4742,8 +4759,8 @@
         </p:nvSpPr>
         <p:spPr>
           <a:xfrm>
-            <a:off x="182880" y="2066543"/>
-            <a:ext cx="1828800" cy="237744"/>
+            <a:off x="182880" y="2093082"/>
+            <a:ext cx="1828800" cy="184666"/>
           </a:xfrm>
           <a:prstGeom prst="rect">
             <a:avLst/>
@@ -4751,14 +4768,14 @@
           <a:noFill/>
         </p:spPr>
         <p:txBody>
-          <a:bodyPr wrap="square" anchor="ctr" lIns="0" rIns="0" tIns="0" bIns="0">
+          <a:bodyPr wrap="square" lIns="0" tIns="0" rIns="0" bIns="0" anchor="ctr">
             <a:spAutoFit/>
           </a:bodyPr>
           <a:lstStyle/>
           <a:p>
             <a:pPr algn="ctr"/>
             <a:r>
-              <a:rPr sz="1000" b="0">
+              <a:rPr sz="1200" b="0" dirty="0">
                 <a:solidFill>
                   <a:srgbClr val="7C7D80"/>
                 </a:solidFill>
@@ -4767,7 +4784,7 @@
               <a:t>T = 50 frames  [B, T, D</a:t>
             </a:r>
             <a:r>
-              <a:rPr sz="1000" b="0" baseline="-25000">
+              <a:rPr sz="1200" b="0" baseline="-25000" dirty="0">
                 <a:solidFill>
                   <a:srgbClr val="7C7D80"/>
                 </a:solidFill>
@@ -4776,7 +4793,7 @@
               <a:t>1</a:t>
             </a:r>
             <a:r>
-              <a:rPr sz="1000" b="0">
+              <a:rPr sz="1200" b="0" dirty="0">
                 <a:solidFill>
                   <a:srgbClr val="7C7D80"/>
                 </a:solidFill>
@@ -4832,6 +4849,7 @@
           <a:lstStyle/>
           <a:p>
             <a:pPr algn="ctr"/>
+            <a:endParaRPr sz="3200"/>
           </a:p>
         </p:txBody>
       </p:sp>
@@ -4843,8 +4861,8 @@
         </p:nvSpPr>
         <p:spPr>
           <a:xfrm>
-            <a:off x="2194560" y="1042415"/>
-            <a:ext cx="3291840" cy="274320"/>
+            <a:off x="2194560" y="1056465"/>
+            <a:ext cx="3291840" cy="246221"/>
           </a:xfrm>
           <a:prstGeom prst="rect">
             <a:avLst/>
@@ -4852,14 +4870,14 @@
           <a:noFill/>
         </p:spPr>
         <p:txBody>
-          <a:bodyPr wrap="square" anchor="ctr" lIns="0" rIns="0" tIns="0" bIns="0">
+          <a:bodyPr wrap="square" lIns="0" tIns="0" rIns="0" bIns="0" anchor="ctr">
             <a:spAutoFit/>
           </a:bodyPr>
           <a:lstStyle/>
           <a:p>
             <a:pPr algn="ctr"/>
             <a:r>
-              <a:rPr sz="1200" b="1">
+              <a:rPr sz="1600" b="1" dirty="0">
                 <a:solidFill>
                   <a:srgbClr val="45464A"/>
                 </a:solidFill>
@@ -4911,12 +4929,12 @@
           </a:fontRef>
         </p:style>
         <p:txBody>
-          <a:bodyPr rtlCol="0" anchor="ctr" wrap="square" lIns="36576" rIns="36576" tIns="36576" bIns="36576"/>
-          <a:lstStyle/>
-          <a:p>
-            <a:pPr algn="ctr"/>
-            <a:r>
-              <a:rPr sz="1000" b="0">
+          <a:bodyPr wrap="square" lIns="36576" tIns="36576" rIns="36576" bIns="36576" rtlCol="0" anchor="ctr"/>
+          <a:lstStyle/>
+          <a:p>
+            <a:pPr algn="ctr"/>
+            <a:r>
+              <a:rPr sz="1100" b="0" dirty="0">
                 <a:solidFill>
                   <a:srgbClr val="45464A"/>
                 </a:solidFill>
@@ -4928,7 +4946,7 @@
           <a:p>
             <a:pPr algn="ctr"/>
             <a:r>
-              <a:rPr sz="1000" b="0">
+              <a:rPr sz="1100" b="0" dirty="0">
                 <a:solidFill>
                   <a:srgbClr val="45464A"/>
                 </a:solidFill>
@@ -4937,7 +4955,7 @@
               <a:t>D</a:t>
             </a:r>
             <a:r>
-              <a:rPr sz="1000" b="0" baseline="-25000">
+              <a:rPr sz="1100" b="0" baseline="-25000" dirty="0">
                 <a:solidFill>
                   <a:srgbClr val="45464A"/>
                 </a:solidFill>
@@ -4946,7 +4964,7 @@
               <a:t>1</a:t>
             </a:r>
             <a:r>
-              <a:rPr sz="1000" b="0">
+              <a:rPr sz="1100" b="0" dirty="0">
                 <a:solidFill>
                   <a:srgbClr val="45464A"/>
                 </a:solidFill>
@@ -4998,12 +5016,12 @@
           </a:fontRef>
         </p:style>
         <p:txBody>
-          <a:bodyPr rtlCol="0" anchor="ctr" wrap="square" lIns="36576" rIns="36576" tIns="36576" bIns="36576"/>
-          <a:lstStyle/>
-          <a:p>
-            <a:pPr algn="ctr"/>
-            <a:r>
-              <a:rPr sz="1000" b="0">
+          <a:bodyPr wrap="square" lIns="36576" tIns="36576" rIns="36576" bIns="36576" rtlCol="0" anchor="ctr"/>
+          <a:lstStyle/>
+          <a:p>
+            <a:pPr algn="ctr"/>
+            <a:r>
+              <a:rPr sz="1100" b="0" dirty="0">
                 <a:solidFill>
                   <a:srgbClr val="45464A"/>
                 </a:solidFill>
@@ -5015,7 +5033,7 @@
           <a:p>
             <a:pPr algn="ctr"/>
             <a:r>
-              <a:rPr sz="1000" b="0">
+              <a:rPr sz="1100" b="0" dirty="0">
                 <a:solidFill>
                   <a:srgbClr val="45464A"/>
                 </a:solidFill>
@@ -5067,12 +5085,12 @@
           </a:fontRef>
         </p:style>
         <p:txBody>
-          <a:bodyPr rtlCol="0" anchor="ctr" wrap="square" lIns="36576" rIns="36576" tIns="36576" bIns="36576"/>
-          <a:lstStyle/>
-          <a:p>
-            <a:pPr algn="ctr"/>
-            <a:r>
-              <a:rPr sz="1000" b="0">
+          <a:bodyPr wrap="square" lIns="36576" tIns="36576" rIns="36576" bIns="36576" rtlCol="0" anchor="ctr"/>
+          <a:lstStyle/>
+          <a:p>
+            <a:pPr algn="ctr"/>
+            <a:r>
+              <a:rPr sz="1100" b="0" dirty="0">
                 <a:solidFill>
                   <a:srgbClr val="45464A"/>
                 </a:solidFill>
@@ -5084,7 +5102,7 @@
           <a:p>
             <a:pPr algn="ctr"/>
             <a:r>
-              <a:rPr sz="1000" b="0">
+              <a:rPr sz="1100" b="0" dirty="0">
                 <a:solidFill>
                   <a:srgbClr val="45464A"/>
                 </a:solidFill>
@@ -5283,8 +5301,8 @@
         </p:nvSpPr>
         <p:spPr>
           <a:xfrm>
-            <a:off x="365760" y="2962656"/>
-            <a:ext cx="1463040" cy="256032"/>
+            <a:off x="365760" y="2967562"/>
+            <a:ext cx="1463040" cy="246221"/>
           </a:xfrm>
           <a:prstGeom prst="rect">
             <a:avLst/>
@@ -5292,14 +5310,14 @@
           <a:noFill/>
         </p:spPr>
         <p:txBody>
-          <a:bodyPr wrap="square" anchor="ctr" lIns="0" rIns="0" tIns="0" bIns="0">
+          <a:bodyPr wrap="square" lIns="0" tIns="0" rIns="0" bIns="0" anchor="ctr">
             <a:spAutoFit/>
           </a:bodyPr>
           <a:lstStyle/>
           <a:p>
             <a:pPr algn="ctr"/>
             <a:r>
-              <a:rPr sz="1200" b="1">
+              <a:rPr sz="1600" b="1" dirty="0">
                 <a:solidFill>
                   <a:srgbClr val="45464A"/>
                 </a:solidFill>
@@ -5353,6 +5371,7 @@
           <a:lstStyle/>
           <a:p>
             <a:pPr algn="ctr"/>
+            <a:endParaRPr sz="3200"/>
           </a:p>
         </p:txBody>
       </p:sp>
@@ -5399,6 +5418,7 @@
           <a:lstStyle/>
           <a:p>
             <a:pPr algn="ctr"/>
+            <a:endParaRPr sz="3200"/>
           </a:p>
         </p:txBody>
       </p:sp>
@@ -5445,6 +5465,7 @@
           <a:lstStyle/>
           <a:p>
             <a:pPr algn="ctr"/>
+            <a:endParaRPr sz="3200"/>
           </a:p>
         </p:txBody>
       </p:sp>
@@ -5491,6 +5512,7 @@
           <a:lstStyle/>
           <a:p>
             <a:pPr algn="ctr"/>
+            <a:endParaRPr sz="3200"/>
           </a:p>
         </p:txBody>
       </p:sp>
@@ -5537,6 +5559,7 @@
           <a:lstStyle/>
           <a:p>
             <a:pPr algn="ctr"/>
+            <a:endParaRPr sz="3200"/>
           </a:p>
         </p:txBody>
       </p:sp>
@@ -5583,6 +5606,7 @@
           <a:lstStyle/>
           <a:p>
             <a:pPr algn="ctr"/>
+            <a:endParaRPr sz="3200"/>
           </a:p>
         </p:txBody>
       </p:sp>
@@ -5629,6 +5653,7 @@
           <a:lstStyle/>
           <a:p>
             <a:pPr algn="ctr"/>
+            <a:endParaRPr sz="3200"/>
           </a:p>
         </p:txBody>
       </p:sp>
@@ -5640,8 +5665,8 @@
         </p:nvSpPr>
         <p:spPr>
           <a:xfrm>
-            <a:off x="182880" y="3895344"/>
-            <a:ext cx="1828800" cy="237744"/>
+            <a:off x="182880" y="3921883"/>
+            <a:ext cx="1828800" cy="184666"/>
           </a:xfrm>
           <a:prstGeom prst="rect">
             <a:avLst/>
@@ -5649,14 +5674,14 @@
           <a:noFill/>
         </p:spPr>
         <p:txBody>
-          <a:bodyPr wrap="square" anchor="ctr" lIns="0" rIns="0" tIns="0" bIns="0">
+          <a:bodyPr wrap="square" lIns="0" tIns="0" rIns="0" bIns="0" anchor="ctr">
             <a:spAutoFit/>
           </a:bodyPr>
           <a:lstStyle/>
           <a:p>
             <a:pPr algn="ctr"/>
             <a:r>
-              <a:rPr sz="1000" b="0">
+              <a:rPr sz="1200" b="0" dirty="0">
                 <a:solidFill>
                   <a:srgbClr val="7C7D80"/>
                 </a:solidFill>
@@ -5665,7 +5690,7 @@
               <a:t>T = 50 frames  [B, T, D</a:t>
             </a:r>
             <a:r>
-              <a:rPr sz="1000" b="0" baseline="-25000">
+              <a:rPr sz="1200" b="0" baseline="-25000" dirty="0">
                 <a:solidFill>
                   <a:srgbClr val="7C7D80"/>
                 </a:solidFill>
@@ -5674,7 +5699,7 @@
               <a:t>M</a:t>
             </a:r>
             <a:r>
-              <a:rPr sz="1000" b="0">
+              <a:rPr sz="1200" b="0" dirty="0">
                 <a:solidFill>
                   <a:srgbClr val="7C7D80"/>
                 </a:solidFill>
@@ -5730,6 +5755,7 @@
           <a:lstStyle/>
           <a:p>
             <a:pPr algn="ctr"/>
+            <a:endParaRPr sz="3200"/>
           </a:p>
         </p:txBody>
       </p:sp>
@@ -5741,8 +5767,8 @@
         </p:nvSpPr>
         <p:spPr>
           <a:xfrm>
-            <a:off x="2194560" y="2871215"/>
-            <a:ext cx="3291840" cy="274320"/>
+            <a:off x="2194560" y="2885265"/>
+            <a:ext cx="3291840" cy="246221"/>
           </a:xfrm>
           <a:prstGeom prst="rect">
             <a:avLst/>
@@ -5750,14 +5776,14 @@
           <a:noFill/>
         </p:spPr>
         <p:txBody>
-          <a:bodyPr wrap="square" anchor="ctr" lIns="0" rIns="0" tIns="0" bIns="0">
+          <a:bodyPr wrap="square" lIns="0" tIns="0" rIns="0" bIns="0" anchor="ctr">
             <a:spAutoFit/>
           </a:bodyPr>
           <a:lstStyle/>
           <a:p>
             <a:pPr algn="ctr"/>
             <a:r>
-              <a:rPr sz="1200" b="1">
+              <a:rPr sz="1600" b="1" dirty="0">
                 <a:solidFill>
                   <a:srgbClr val="45464A"/>
                 </a:solidFill>
@@ -5809,12 +5835,12 @@
           </a:fontRef>
         </p:style>
         <p:txBody>
-          <a:bodyPr rtlCol="0" anchor="ctr" wrap="square" lIns="36576" rIns="36576" tIns="36576" bIns="36576"/>
-          <a:lstStyle/>
-          <a:p>
-            <a:pPr algn="ctr"/>
-            <a:r>
-              <a:rPr sz="1000" b="0">
+          <a:bodyPr wrap="square" lIns="36576" tIns="36576" rIns="36576" bIns="36576" rtlCol="0" anchor="ctr"/>
+          <a:lstStyle/>
+          <a:p>
+            <a:pPr algn="ctr"/>
+            <a:r>
+              <a:rPr sz="1100" b="0" dirty="0">
                 <a:solidFill>
                   <a:srgbClr val="45464A"/>
                 </a:solidFill>
@@ -5826,7 +5852,7 @@
           <a:p>
             <a:pPr algn="ctr"/>
             <a:r>
-              <a:rPr sz="1000" b="0">
+              <a:rPr sz="1100" b="0" dirty="0">
                 <a:solidFill>
                   <a:srgbClr val="45464A"/>
                 </a:solidFill>
@@ -5835,7 +5861,7 @@
               <a:t>D</a:t>
             </a:r>
             <a:r>
-              <a:rPr sz="1000" b="0" baseline="-25000">
+              <a:rPr sz="1100" b="0" baseline="-25000" dirty="0">
                 <a:solidFill>
                   <a:srgbClr val="45464A"/>
                 </a:solidFill>
@@ -5844,7 +5870,7 @@
               <a:t>M</a:t>
             </a:r>
             <a:r>
-              <a:rPr sz="1000" b="0">
+              <a:rPr sz="1100" b="0" dirty="0">
                 <a:solidFill>
                   <a:srgbClr val="45464A"/>
                 </a:solidFill>
@@ -5896,12 +5922,12 @@
           </a:fontRef>
         </p:style>
         <p:txBody>
-          <a:bodyPr rtlCol="0" anchor="ctr" wrap="square" lIns="36576" rIns="36576" tIns="36576" bIns="36576"/>
-          <a:lstStyle/>
-          <a:p>
-            <a:pPr algn="ctr"/>
-            <a:r>
-              <a:rPr sz="1000" b="0">
+          <a:bodyPr wrap="square" lIns="36576" tIns="36576" rIns="36576" bIns="36576" rtlCol="0" anchor="ctr"/>
+          <a:lstStyle/>
+          <a:p>
+            <a:pPr algn="ctr"/>
+            <a:r>
+              <a:rPr sz="1100" b="0" dirty="0">
                 <a:solidFill>
                   <a:srgbClr val="45464A"/>
                 </a:solidFill>
@@ -5913,7 +5939,7 @@
           <a:p>
             <a:pPr algn="ctr"/>
             <a:r>
-              <a:rPr sz="1000" b="0">
+              <a:rPr sz="1100" b="0" dirty="0">
                 <a:solidFill>
                   <a:srgbClr val="45464A"/>
                 </a:solidFill>
@@ -5965,12 +5991,12 @@
           </a:fontRef>
         </p:style>
         <p:txBody>
-          <a:bodyPr rtlCol="0" anchor="ctr" wrap="square" lIns="36576" rIns="36576" tIns="36576" bIns="36576"/>
-          <a:lstStyle/>
-          <a:p>
-            <a:pPr algn="ctr"/>
-            <a:r>
-              <a:rPr sz="1000" b="0">
+          <a:bodyPr wrap="square" lIns="36576" tIns="36576" rIns="36576" bIns="36576" rtlCol="0" anchor="ctr"/>
+          <a:lstStyle/>
+          <a:p>
+            <a:pPr algn="ctr"/>
+            <a:r>
+              <a:rPr sz="1100" b="0" dirty="0">
                 <a:solidFill>
                   <a:srgbClr val="45464A"/>
                 </a:solidFill>
@@ -5978,11 +6004,17 @@
               </a:rPr>
               <a:t>Transformer</a:t>
             </a:r>
-          </a:p>
-          <a:p>
-            <a:pPr algn="ctr"/>
-            <a:r>
-              <a:rPr sz="1000" b="0">
+            <a:endParaRPr sz="1200" b="0" dirty="0">
+              <a:solidFill>
+                <a:srgbClr val="45464A"/>
+              </a:solidFill>
+              <a:latin typeface="Arial"/>
+            </a:endParaRPr>
+          </a:p>
+          <a:p>
+            <a:pPr algn="ctr"/>
+            <a:r>
+              <a:rPr sz="1200" b="0" dirty="0">
                 <a:solidFill>
                   <a:srgbClr val="45464A"/>
                 </a:solidFill>
@@ -6216,6 +6248,7 @@
           <a:lstStyle/>
           <a:p>
             <a:pPr algn="ctr"/>
+            <a:endParaRPr sz="3200"/>
           </a:p>
         </p:txBody>
       </p:sp>
@@ -6262,6 +6295,7 @@
           <a:lstStyle/>
           <a:p>
             <a:pPr algn="ctr"/>
+            <a:endParaRPr sz="3200"/>
           </a:p>
         </p:txBody>
       </p:sp>
@@ -6308,6 +6342,7 @@
           <a:lstStyle/>
           <a:p>
             <a:pPr algn="ctr"/>
+            <a:endParaRPr sz="3200"/>
           </a:p>
         </p:txBody>
       </p:sp>
@@ -6354,6 +6389,7 @@
           <a:lstStyle/>
           <a:p>
             <a:pPr algn="ctr"/>
+            <a:endParaRPr sz="3200"/>
           </a:p>
         </p:txBody>
       </p:sp>
@@ -6400,6 +6436,7 @@
           <a:lstStyle/>
           <a:p>
             <a:pPr algn="ctr"/>
+            <a:endParaRPr sz="3200"/>
           </a:p>
         </p:txBody>
       </p:sp>
@@ -6446,6 +6483,7 @@
           <a:lstStyle/>
           <a:p>
             <a:pPr algn="ctr"/>
+            <a:endParaRPr sz="3200"/>
           </a:p>
         </p:txBody>
       </p:sp>
@@ -6490,12 +6528,12 @@
           </a:fontRef>
         </p:style>
         <p:txBody>
-          <a:bodyPr rtlCol="0" anchor="ctr" wrap="square" lIns="36576" rIns="36576" tIns="36576" bIns="36576" vert="vert270"/>
-          <a:lstStyle/>
-          <a:p>
-            <a:pPr algn="ctr"/>
-            <a:r>
-              <a:rPr sz="1000" b="0">
+          <a:bodyPr vert="vert270" wrap="square" lIns="36576" tIns="36576" rIns="36576" bIns="36576" rtlCol="0" anchor="ctr"/>
+          <a:lstStyle/>
+          <a:p>
+            <a:pPr algn="ctr"/>
+            <a:r>
+              <a:rPr sz="1400" b="0">
                 <a:solidFill>
                   <a:srgbClr val="45464A"/>
                 </a:solidFill>
@@ -6583,12 +6621,12 @@
           </a:fontRef>
         </p:style>
         <p:txBody>
-          <a:bodyPr rtlCol="0" anchor="ctr" wrap="square" lIns="36576" rIns="36576" tIns="36576" bIns="36576"/>
-          <a:lstStyle/>
-          <a:p>
-            <a:pPr algn="ctr"/>
-            <a:r>
-              <a:rPr sz="1200" b="1">
+          <a:bodyPr wrap="square" lIns="36576" tIns="36576" rIns="36576" bIns="36576" rtlCol="0" anchor="ctr"/>
+          <a:lstStyle/>
+          <a:p>
+            <a:pPr algn="ctr"/>
+            <a:r>
+              <a:rPr sz="1600" b="1" dirty="0">
                 <a:solidFill>
                   <a:srgbClr val="45464A"/>
                 </a:solidFill>
@@ -6600,7 +6638,7 @@
           <a:p>
             <a:pPr algn="ctr"/>
             <a:r>
-              <a:rPr sz="1000" b="0">
+              <a:rPr sz="1200" b="0" dirty="0">
                 <a:solidFill>
                   <a:srgbClr val="45464A"/>
                 </a:solidFill>
@@ -6612,7 +6650,7 @@
           <a:p>
             <a:pPr algn="ctr"/>
             <a:r>
-              <a:rPr sz="1000" b="0">
+              <a:rPr sz="1200" b="0" dirty="0">
                 <a:solidFill>
                   <a:srgbClr val="45464A"/>
                 </a:solidFill>
@@ -6626,7 +6664,9 @@
       <p:cxnSp>
         <p:nvCxnSpPr>
           <p:cNvPr id="79" name="Connector 78"/>
-          <p:cNvCxnSpPr/>
+          <p:cNvCxnSpPr>
+            <a:cxnSpLocks/>
+          </p:cNvCxnSpPr>
           <p:nvPr/>
         </p:nvCxnSpPr>
         <p:spPr>
@@ -6700,32 +6740,41 @@
           </a:fontRef>
         </p:style>
         <p:txBody>
-          <a:bodyPr rtlCol="0" anchor="ctr" wrap="square" lIns="36576" rIns="36576" tIns="36576" bIns="36576"/>
-          <a:lstStyle/>
-          <a:p>
-            <a:pPr algn="ctr"/>
-            <a:r>
-              <a:rPr sz="1000" b="0">
+          <a:bodyPr wrap="square" lIns="36576" tIns="36576" rIns="36576" bIns="36576" rtlCol="0" anchor="ctr"/>
+          <a:lstStyle/>
+          <a:p>
+            <a:pPr algn="ctr"/>
+            <a:r>
+              <a:rPr lang="en-US" sz="1400" b="0" dirty="0">
                 <a:solidFill>
                   <a:srgbClr val="45464A"/>
                 </a:solidFill>
                 <a:latin typeface="Arial"/>
               </a:rPr>
-              <a:t>Fused logits  ·  5 classes</a:t>
-            </a:r>
+              <a:t>Which Vote?</a:t>
+            </a:r>
+            <a:endParaRPr sz="1400" b="0" dirty="0">
+              <a:solidFill>
+                <a:srgbClr val="45464A"/>
+              </a:solidFill>
+              <a:latin typeface="Arial"/>
+            </a:endParaRPr>
           </a:p>
         </p:txBody>
       </p:sp>
       <p:cxnSp>
         <p:nvCxnSpPr>
           <p:cNvPr id="81" name="Connector 80"/>
-          <p:cNvCxnSpPr/>
+          <p:cNvCxnSpPr>
+            <a:cxnSpLocks/>
+            <a:endCxn id="91" idx="0"/>
+          </p:cNvCxnSpPr>
           <p:nvPr/>
         </p:nvCxnSpPr>
         <p:spPr>
           <a:xfrm>
             <a:off x="10881360" y="4069080"/>
-            <a:ext cx="0" cy="777240"/>
+            <a:ext cx="0" cy="955548"/>
           </a:xfrm>
           <a:prstGeom prst="line">
             <a:avLst/>
@@ -6761,7 +6810,7 @@
         <p:spPr>
           <a:xfrm>
             <a:off x="5897880" y="4800600"/>
-            <a:ext cx="3017520" cy="1371600"/>
+            <a:ext cx="3017520" cy="1510206"/>
           </a:xfrm>
           <a:prstGeom prst="roundRect">
             <a:avLst>
@@ -6798,6 +6847,7 @@
           <a:lstStyle/>
           <a:p>
             <a:pPr algn="ctr"/>
+            <a:endParaRPr sz="3200"/>
           </a:p>
         </p:txBody>
       </p:sp>
@@ -6845,8 +6895,8 @@
         </p:nvSpPr>
         <p:spPr>
           <a:xfrm>
-            <a:off x="6784848" y="4453128"/>
-            <a:ext cx="2377440" cy="237744"/>
+            <a:off x="6784848" y="4356557"/>
+            <a:ext cx="2377440" cy="430887"/>
           </a:xfrm>
           <a:prstGeom prst="rect">
             <a:avLst/>
@@ -6854,14 +6904,14 @@
           <a:noFill/>
         </p:spPr>
         <p:txBody>
-          <a:bodyPr wrap="square" anchor="ctr" lIns="0" rIns="0" tIns="0" bIns="0">
+          <a:bodyPr wrap="square" lIns="0" tIns="0" rIns="0" bIns="0" anchor="ctr">
             <a:spAutoFit/>
           </a:bodyPr>
           <a:lstStyle/>
           <a:p>
             <a:pPr algn="l"/>
             <a:r>
-              <a:rPr sz="1000" b="0">
+              <a:rPr sz="1400" b="0">
                 <a:solidFill>
                   <a:srgbClr val="7C7D80"/>
                 </a:solidFill>
@@ -6913,12 +6963,12 @@
           </a:fontRef>
         </p:style>
         <p:txBody>
-          <a:bodyPr rtlCol="0" anchor="ctr" wrap="square" lIns="36576" rIns="36576" tIns="36576" bIns="36576"/>
-          <a:lstStyle/>
-          <a:p>
-            <a:pPr algn="ctr"/>
-            <a:r>
-              <a:rPr sz="1000" b="0">
+          <a:bodyPr wrap="square" lIns="36576" tIns="36576" rIns="36576" bIns="36576" rtlCol="0" anchor="ctr"/>
+          <a:lstStyle/>
+          <a:p>
+            <a:pPr algn="ctr"/>
+            <a:r>
+              <a:rPr sz="1400" b="0">
                 <a:solidFill>
                   <a:srgbClr val="45464A"/>
                 </a:solidFill>
@@ -6930,7 +6980,7 @@
           <a:p>
             <a:pPr algn="ctr"/>
             <a:r>
-              <a:rPr sz="1000" b="0">
+              <a:rPr sz="1400" b="0">
                 <a:solidFill>
                   <a:srgbClr val="45464A"/>
                 </a:solidFill>
@@ -6982,12 +7032,12 @@
           </a:fontRef>
         </p:style>
         <p:txBody>
-          <a:bodyPr rtlCol="0" anchor="ctr" wrap="square" lIns="36576" rIns="36576" tIns="36576" bIns="36576"/>
-          <a:lstStyle/>
-          <a:p>
-            <a:pPr algn="ctr"/>
-            <a:r>
-              <a:rPr sz="1000" b="0">
+          <a:bodyPr wrap="square" lIns="36576" tIns="36576" rIns="36576" bIns="36576" rtlCol="0" anchor="ctr"/>
+          <a:lstStyle/>
+          <a:p>
+            <a:pPr algn="ctr"/>
+            <a:r>
+              <a:rPr sz="1400" b="0">
                 <a:solidFill>
                   <a:srgbClr val="45464A"/>
                 </a:solidFill>
@@ -6999,7 +7049,7 @@
           <a:p>
             <a:pPr algn="ctr"/>
             <a:r>
-              <a:rPr sz="1000" b="0">
+              <a:rPr sz="1400" b="0">
                 <a:solidFill>
                   <a:srgbClr val="45464A"/>
                 </a:solidFill>
@@ -7054,8 +7104,8 @@
         </p:nvSpPr>
         <p:spPr>
           <a:xfrm>
-            <a:off x="5897880" y="5788152"/>
-            <a:ext cx="3017520" cy="274320"/>
+            <a:off x="5897880" y="5764171"/>
+            <a:ext cx="3017520" cy="492443"/>
           </a:xfrm>
           <a:prstGeom prst="rect">
             <a:avLst/>
@@ -7063,14 +7113,14 @@
           <a:noFill/>
         </p:spPr>
         <p:txBody>
-          <a:bodyPr wrap="square" anchor="ctr" lIns="0" rIns="0" tIns="0" bIns="0">
+          <a:bodyPr wrap="square" lIns="0" tIns="0" rIns="0" bIns="0" anchor="ctr">
             <a:spAutoFit/>
           </a:bodyPr>
           <a:lstStyle/>
           <a:p>
             <a:pPr algn="ctr"/>
             <a:r>
-              <a:rPr sz="1200" b="1">
+              <a:rPr sz="1600" b="1" dirty="0">
                 <a:solidFill>
                   <a:srgbClr val="45464A"/>
                 </a:solidFill>
@@ -7084,13 +7134,16 @@
       <p:cxnSp>
         <p:nvCxnSpPr>
           <p:cNvPr id="89" name="Connector 88"/>
-          <p:cNvCxnSpPr/>
+          <p:cNvCxnSpPr>
+            <a:cxnSpLocks/>
+            <a:endCxn id="91" idx="1"/>
+          </p:cNvCxnSpPr>
           <p:nvPr/>
         </p:nvCxnSpPr>
         <p:spPr>
           <a:xfrm>
             <a:off x="8778240" y="5326380"/>
-            <a:ext cx="1188720" cy="0"/>
+            <a:ext cx="1330458" cy="0"/>
           </a:xfrm>
           <a:prstGeom prst="line">
             <a:avLst/>
@@ -7119,49 +7172,14 @@
       </p:cxnSp>
       <p:sp>
         <p:nvSpPr>
-          <p:cNvPr id="90" name="TextBox 89"/>
-          <p:cNvSpPr txBox="1"/>
-          <p:nvPr/>
-        </p:nvSpPr>
-        <p:spPr>
-          <a:xfrm>
-            <a:off x="8961120" y="5047488"/>
-            <a:ext cx="960120" cy="237744"/>
-          </a:xfrm>
-          <a:prstGeom prst="rect">
-            <a:avLst/>
-          </a:prstGeom>
-          <a:noFill/>
-        </p:spPr>
-        <p:txBody>
-          <a:bodyPr wrap="square" anchor="ctr" lIns="0" rIns="0" tIns="0" bIns="0">
-            <a:spAutoFit/>
-          </a:bodyPr>
-          <a:lstStyle/>
-          <a:p>
-            <a:pPr algn="ctr"/>
-            <a:r>
-              <a:rPr sz="1000" b="0">
-                <a:solidFill>
-                  <a:srgbClr val="7C7D80"/>
-                </a:solidFill>
-                <a:latin typeface="Arial"/>
-              </a:rPr>
-              <a:t>aux logits</a:t>
-            </a:r>
-          </a:p>
-        </p:txBody>
-      </p:sp>
-      <p:sp>
-        <p:nvSpPr>
           <p:cNvPr id="91" name="Rounded Rectangle 90"/>
           <p:cNvSpPr/>
           <p:nvPr/>
         </p:nvSpPr>
         <p:spPr>
           <a:xfrm>
-            <a:off x="9966960" y="4846320"/>
-            <a:ext cx="1828800" cy="960120"/>
+            <a:off x="10108698" y="5024628"/>
+            <a:ext cx="1545323" cy="603504"/>
           </a:xfrm>
           <a:prstGeom prst="roundRect">
             <a:avLst>
@@ -7193,575 +7211,18 @@
           </a:fontRef>
         </p:style>
         <p:txBody>
-          <a:bodyPr rtlCol="0" anchor="ctr" wrap="square" lIns="36576" rIns="36576" tIns="36576" bIns="36576"/>
-          <a:lstStyle/>
-          <a:p>
-            <a:pPr algn="ctr"/>
-            <a:r>
-              <a:rPr sz="1200" b="1">
+          <a:bodyPr wrap="square" lIns="36576" tIns="36576" rIns="36576" bIns="36576" rtlCol="0" anchor="ctr"/>
+          <a:lstStyle/>
+          <a:p>
+            <a:pPr algn="ctr"/>
+            <a:r>
+              <a:rPr sz="1600" b="1" dirty="0">
                 <a:solidFill>
                   <a:srgbClr val="45464A"/>
                 </a:solidFill>
                 <a:latin typeface="Arial"/>
               </a:rPr>
               <a:t>Training loss</a:t>
-            </a:r>
-          </a:p>
-          <a:p>
-            <a:pPr algn="ctr"/>
-            <a:r>
-              <a:rPr sz="1000" b="0">
-                <a:solidFill>
-                  <a:srgbClr val="45464A"/>
-                </a:solidFill>
-                <a:latin typeface="Arial"/>
-              </a:rPr>
-              <a:t>CE(fused) +</a:t>
-            </a:r>
-          </a:p>
-          <a:p>
-            <a:pPr algn="ctr"/>
-            <a:r>
-              <a:rPr sz="1000" b="0">
-                <a:solidFill>
-                  <a:srgbClr val="45464A"/>
-                </a:solidFill>
-                <a:latin typeface="Arial"/>
-              </a:rPr>
-              <a:t>λ · mean CE(aux),  λ = 0.1</a:t>
-            </a:r>
-          </a:p>
-        </p:txBody>
-      </p:sp>
-      <p:sp>
-        <p:nvSpPr>
-          <p:cNvPr id="92" name="Rounded Rectangle 91"/>
-          <p:cNvSpPr/>
-          <p:nvPr/>
-        </p:nvSpPr>
-        <p:spPr>
-          <a:xfrm>
-            <a:off x="457200" y="4983480"/>
-            <a:ext cx="274320" cy="182880"/>
-          </a:xfrm>
-          <a:prstGeom prst="roundRect">
-            <a:avLst>
-              <a:gd name="adj" fmla="val 20000"/>
-            </a:avLst>
-          </a:prstGeom>
-          <a:solidFill>
-            <a:srgbClr val="B4C3CE"/>
-          </a:solidFill>
-          <a:ln w="12700">
-            <a:solidFill>
-              <a:srgbClr val="7F95A6"/>
-            </a:solidFill>
-          </a:ln>
-          <a:effectLst/>
-        </p:spPr>
-        <p:style>
-          <a:lnRef idx="1">
-            <a:schemeClr val="accent1"/>
-          </a:lnRef>
-          <a:fillRef idx="3">
-            <a:schemeClr val="accent1"/>
-          </a:fillRef>
-          <a:effectRef idx="2">
-            <a:schemeClr val="accent1"/>
-          </a:effectRef>
-          <a:fontRef idx="minor">
-            <a:schemeClr val="lt1"/>
-          </a:fontRef>
-        </p:style>
-        <p:txBody>
-          <a:bodyPr rtlCol="0" anchor="ctr"/>
-          <a:lstStyle/>
-          <a:p>
-            <a:pPr algn="ctr"/>
-          </a:p>
-        </p:txBody>
-      </p:sp>
-      <p:sp>
-        <p:nvSpPr>
-          <p:cNvPr id="93" name="TextBox 92"/>
-          <p:cNvSpPr txBox="1"/>
-          <p:nvPr/>
-        </p:nvSpPr>
-        <p:spPr>
-          <a:xfrm>
-            <a:off x="822960" y="4956048"/>
-            <a:ext cx="1920240" cy="237744"/>
-          </a:xfrm>
-          <a:prstGeom prst="rect">
-            <a:avLst/>
-          </a:prstGeom>
-          <a:noFill/>
-        </p:spPr>
-        <p:txBody>
-          <a:bodyPr wrap="square" anchor="ctr" lIns="0" rIns="0" tIns="0" bIns="0">
-            <a:spAutoFit/>
-          </a:bodyPr>
-          <a:lstStyle/>
-          <a:p>
-            <a:pPr algn="l"/>
-            <a:r>
-              <a:rPr sz="1000" b="0">
-                <a:solidFill>
-                  <a:srgbClr val="45464A"/>
-                </a:solidFill>
-                <a:latin typeface="Arial"/>
-              </a:rPr>
-              <a:t>Modality 1 stream</a:t>
-            </a:r>
-          </a:p>
-        </p:txBody>
-      </p:sp>
-      <p:sp>
-        <p:nvSpPr>
-          <p:cNvPr id="94" name="Rounded Rectangle 93"/>
-          <p:cNvSpPr/>
-          <p:nvPr/>
-        </p:nvSpPr>
-        <p:spPr>
-          <a:xfrm>
-            <a:off x="2834640" y="4983480"/>
-            <a:ext cx="274320" cy="182880"/>
-          </a:xfrm>
-          <a:prstGeom prst="roundRect">
-            <a:avLst>
-              <a:gd name="adj" fmla="val 20000"/>
-            </a:avLst>
-          </a:prstGeom>
-          <a:solidFill>
-            <a:srgbClr val="DCC1BD"/>
-          </a:solidFill>
-          <a:ln w="12700">
-            <a:solidFill>
-              <a:srgbClr val="B08E8A"/>
-            </a:solidFill>
-          </a:ln>
-          <a:effectLst/>
-        </p:spPr>
-        <p:style>
-          <a:lnRef idx="1">
-            <a:schemeClr val="accent1"/>
-          </a:lnRef>
-          <a:fillRef idx="3">
-            <a:schemeClr val="accent1"/>
-          </a:fillRef>
-          <a:effectRef idx="2">
-            <a:schemeClr val="accent1"/>
-          </a:effectRef>
-          <a:fontRef idx="minor">
-            <a:schemeClr val="lt1"/>
-          </a:fontRef>
-        </p:style>
-        <p:txBody>
-          <a:bodyPr rtlCol="0" anchor="ctr"/>
-          <a:lstStyle/>
-          <a:p>
-            <a:pPr algn="ctr"/>
-          </a:p>
-        </p:txBody>
-      </p:sp>
-      <p:sp>
-        <p:nvSpPr>
-          <p:cNvPr id="95" name="TextBox 94"/>
-          <p:cNvSpPr txBox="1"/>
-          <p:nvPr/>
-        </p:nvSpPr>
-        <p:spPr>
-          <a:xfrm>
-            <a:off x="3200400" y="4956048"/>
-            <a:ext cx="1920240" cy="237744"/>
-          </a:xfrm>
-          <a:prstGeom prst="rect">
-            <a:avLst/>
-          </a:prstGeom>
-          <a:noFill/>
-        </p:spPr>
-        <p:txBody>
-          <a:bodyPr wrap="square" anchor="ctr" lIns="0" rIns="0" tIns="0" bIns="0">
-            <a:spAutoFit/>
-          </a:bodyPr>
-          <a:lstStyle/>
-          <a:p>
-            <a:pPr algn="l"/>
-            <a:r>
-              <a:rPr sz="1000" b="0">
-                <a:solidFill>
-                  <a:srgbClr val="45464A"/>
-                </a:solidFill>
-                <a:latin typeface="Arial"/>
-              </a:rPr>
-              <a:t>Modality M stream</a:t>
-            </a:r>
-          </a:p>
-        </p:txBody>
-      </p:sp>
-      <p:sp>
-        <p:nvSpPr>
-          <p:cNvPr id="96" name="Rounded Rectangle 95"/>
-          <p:cNvSpPr/>
-          <p:nvPr/>
-        </p:nvSpPr>
-        <p:spPr>
-          <a:xfrm>
-            <a:off x="457200" y="5312664"/>
-            <a:ext cx="274320" cy="182880"/>
-          </a:xfrm>
-          <a:prstGeom prst="roundRect">
-            <a:avLst>
-              <a:gd name="adj" fmla="val 20000"/>
-            </a:avLst>
-          </a:prstGeom>
-          <a:solidFill>
-            <a:srgbClr val="C3CFBE"/>
-          </a:solidFill>
-          <a:ln w="12700">
-            <a:solidFill>
-              <a:srgbClr val="8FA28A"/>
-            </a:solidFill>
-          </a:ln>
-          <a:effectLst/>
-        </p:spPr>
-        <p:style>
-          <a:lnRef idx="1">
-            <a:schemeClr val="accent1"/>
-          </a:lnRef>
-          <a:fillRef idx="3">
-            <a:schemeClr val="accent1"/>
-          </a:fillRef>
-          <a:effectRef idx="2">
-            <a:schemeClr val="accent1"/>
-          </a:effectRef>
-          <a:fontRef idx="minor">
-            <a:schemeClr val="lt1"/>
-          </a:fontRef>
-        </p:style>
-        <p:txBody>
-          <a:bodyPr rtlCol="0" anchor="ctr"/>
-          <a:lstStyle/>
-          <a:p>
-            <a:pPr algn="ctr"/>
-          </a:p>
-        </p:txBody>
-      </p:sp>
-      <p:sp>
-        <p:nvSpPr>
-          <p:cNvPr id="97" name="TextBox 96"/>
-          <p:cNvSpPr txBox="1"/>
-          <p:nvPr/>
-        </p:nvSpPr>
-        <p:spPr>
-          <a:xfrm>
-            <a:off x="822960" y="5285232"/>
-            <a:ext cx="1920240" cy="237744"/>
-          </a:xfrm>
-          <a:prstGeom prst="rect">
-            <a:avLst/>
-          </a:prstGeom>
-          <a:noFill/>
-        </p:spPr>
-        <p:txBody>
-          <a:bodyPr wrap="square" anchor="ctr" lIns="0" rIns="0" tIns="0" bIns="0">
-            <a:spAutoFit/>
-          </a:bodyPr>
-          <a:lstStyle/>
-          <a:p>
-            <a:pPr algn="l"/>
-            <a:r>
-              <a:rPr sz="1000" b="0">
-                <a:solidFill>
-                  <a:srgbClr val="45464A"/>
-                </a:solidFill>
-                <a:latin typeface="Arial"/>
-              </a:rPr>
-              <a:t>Cross-modal fusion</a:t>
-            </a:r>
-          </a:p>
-        </p:txBody>
-      </p:sp>
-      <p:sp>
-        <p:nvSpPr>
-          <p:cNvPr id="98" name="Rounded Rectangle 97"/>
-          <p:cNvSpPr/>
-          <p:nvPr/>
-        </p:nvSpPr>
-        <p:spPr>
-          <a:xfrm>
-            <a:off x="2834640" y="5312664"/>
-            <a:ext cx="274320" cy="182880"/>
-          </a:xfrm>
-          <a:prstGeom prst="roundRect">
-            <a:avLst>
-              <a:gd name="adj" fmla="val 20000"/>
-            </a:avLst>
-          </a:prstGeom>
-          <a:solidFill>
-            <a:srgbClr val="CFC5D3"/>
-          </a:solidFill>
-          <a:ln w="12700">
-            <a:solidFill>
-              <a:srgbClr val="9A8BA0"/>
-            </a:solidFill>
-          </a:ln>
-          <a:effectLst/>
-        </p:spPr>
-        <p:style>
-          <a:lnRef idx="1">
-            <a:schemeClr val="accent1"/>
-          </a:lnRef>
-          <a:fillRef idx="3">
-            <a:schemeClr val="accent1"/>
-          </a:fillRef>
-          <a:effectRef idx="2">
-            <a:schemeClr val="accent1"/>
-          </a:effectRef>
-          <a:fontRef idx="minor">
-            <a:schemeClr val="lt1"/>
-          </a:fontRef>
-        </p:style>
-        <p:txBody>
-          <a:bodyPr rtlCol="0" anchor="ctr"/>
-          <a:lstStyle/>
-          <a:p>
-            <a:pPr algn="ctr"/>
-          </a:p>
-        </p:txBody>
-      </p:sp>
-      <p:sp>
-        <p:nvSpPr>
-          <p:cNvPr id="99" name="TextBox 98"/>
-          <p:cNvSpPr txBox="1"/>
-          <p:nvPr/>
-        </p:nvSpPr>
-        <p:spPr>
-          <a:xfrm>
-            <a:off x="3200400" y="5285232"/>
-            <a:ext cx="1920240" cy="237744"/>
-          </a:xfrm>
-          <a:prstGeom prst="rect">
-            <a:avLst/>
-          </a:prstGeom>
-          <a:noFill/>
-        </p:spPr>
-        <p:txBody>
-          <a:bodyPr wrap="square" anchor="ctr" lIns="0" rIns="0" tIns="0" bIns="0">
-            <a:spAutoFit/>
-          </a:bodyPr>
-          <a:lstStyle/>
-          <a:p>
-            <a:pPr algn="l"/>
-            <a:r>
-              <a:rPr sz="1000" b="0">
-                <a:solidFill>
-                  <a:srgbClr val="45464A"/>
-                </a:solidFill>
-                <a:latin typeface="Arial"/>
-              </a:rPr>
-              <a:t>Classifier head</a:t>
-            </a:r>
-          </a:p>
-        </p:txBody>
-      </p:sp>
-      <p:sp>
-        <p:nvSpPr>
-          <p:cNvPr id="100" name="Rounded Rectangle 99"/>
-          <p:cNvSpPr/>
-          <p:nvPr/>
-        </p:nvSpPr>
-        <p:spPr>
-          <a:xfrm>
-            <a:off x="457200" y="5641848"/>
-            <a:ext cx="274320" cy="182880"/>
-          </a:xfrm>
-          <a:prstGeom prst="roundRect">
-            <a:avLst>
-              <a:gd name="adj" fmla="val 20000"/>
-            </a:avLst>
-          </a:prstGeom>
-          <a:solidFill>
-            <a:srgbClr val="E3D7BE"/>
-          </a:solidFill>
-          <a:ln w="12700">
-            <a:solidFill>
-              <a:srgbClr val="B5A27C"/>
-            </a:solidFill>
-          </a:ln>
-          <a:effectLst/>
-        </p:spPr>
-        <p:style>
-          <a:lnRef idx="1">
-            <a:schemeClr val="accent1"/>
-          </a:lnRef>
-          <a:fillRef idx="3">
-            <a:schemeClr val="accent1"/>
-          </a:fillRef>
-          <a:effectRef idx="2">
-            <a:schemeClr val="accent1"/>
-          </a:effectRef>
-          <a:fontRef idx="minor">
-            <a:schemeClr val="lt1"/>
-          </a:fontRef>
-        </p:style>
-        <p:txBody>
-          <a:bodyPr rtlCol="0" anchor="ctr"/>
-          <a:lstStyle/>
-          <a:p>
-            <a:pPr algn="ctr"/>
-          </a:p>
-        </p:txBody>
-      </p:sp>
-      <p:sp>
-        <p:nvSpPr>
-          <p:cNvPr id="101" name="TextBox 100"/>
-          <p:cNvSpPr txBox="1"/>
-          <p:nvPr/>
-        </p:nvSpPr>
-        <p:spPr>
-          <a:xfrm>
-            <a:off x="822960" y="5614416"/>
-            <a:ext cx="1920240" cy="237744"/>
-          </a:xfrm>
-          <a:prstGeom prst="rect">
-            <a:avLst/>
-          </a:prstGeom>
-          <a:noFill/>
-        </p:spPr>
-        <p:txBody>
-          <a:bodyPr wrap="square" anchor="ctr" lIns="0" rIns="0" tIns="0" bIns="0">
-            <a:spAutoFit/>
-          </a:bodyPr>
-          <a:lstStyle/>
-          <a:p>
-            <a:pPr algn="l"/>
-            <a:r>
-              <a:rPr sz="1000" b="0">
-                <a:solidFill>
-                  <a:srgbClr val="45464A"/>
-                </a:solidFill>
-                <a:latin typeface="Arial"/>
-              </a:rPr>
-              <a:t>Auxiliary supervision</a:t>
-            </a:r>
-          </a:p>
-        </p:txBody>
-      </p:sp>
-      <p:sp>
-        <p:nvSpPr>
-          <p:cNvPr id="102" name="Rounded Rectangle 101"/>
-          <p:cNvSpPr/>
-          <p:nvPr/>
-        </p:nvSpPr>
-        <p:spPr>
-          <a:xfrm>
-            <a:off x="2834640" y="5641848"/>
-            <a:ext cx="274320" cy="182880"/>
-          </a:xfrm>
-          <a:prstGeom prst="roundRect">
-            <a:avLst>
-              <a:gd name="adj" fmla="val 20000"/>
-            </a:avLst>
-          </a:prstGeom>
-          <a:solidFill>
-            <a:srgbClr val="C9C1B9"/>
-          </a:solidFill>
-          <a:ln w="12700">
-            <a:solidFill>
-              <a:srgbClr val="8A8179"/>
-            </a:solidFill>
-          </a:ln>
-          <a:effectLst/>
-        </p:spPr>
-        <p:style>
-          <a:lnRef idx="1">
-            <a:schemeClr val="accent1"/>
-          </a:lnRef>
-          <a:fillRef idx="3">
-            <a:schemeClr val="accent1"/>
-          </a:fillRef>
-          <a:effectRef idx="2">
-            <a:schemeClr val="accent1"/>
-          </a:effectRef>
-          <a:fontRef idx="minor">
-            <a:schemeClr val="lt1"/>
-          </a:fontRef>
-        </p:style>
-        <p:txBody>
-          <a:bodyPr rtlCol="0" anchor="ctr"/>
-          <a:lstStyle/>
-          <a:p>
-            <a:pPr algn="ctr"/>
-          </a:p>
-        </p:txBody>
-      </p:sp>
-      <p:sp>
-        <p:nvSpPr>
-          <p:cNvPr id="103" name="TextBox 102"/>
-          <p:cNvSpPr txBox="1"/>
-          <p:nvPr/>
-        </p:nvSpPr>
-        <p:spPr>
-          <a:xfrm>
-            <a:off x="3200400" y="5614416"/>
-            <a:ext cx="1920240" cy="237744"/>
-          </a:xfrm>
-          <a:prstGeom prst="rect">
-            <a:avLst/>
-          </a:prstGeom>
-          <a:noFill/>
-        </p:spPr>
-        <p:txBody>
-          <a:bodyPr wrap="square" anchor="ctr" lIns="0" rIns="0" tIns="0" bIns="0">
-            <a:spAutoFit/>
-          </a:bodyPr>
-          <a:lstStyle/>
-          <a:p>
-            <a:pPr algn="l"/>
-            <a:r>
-              <a:rPr sz="1000" b="0">
-                <a:solidFill>
-                  <a:srgbClr val="45464A"/>
-                </a:solidFill>
-                <a:latin typeface="Arial"/>
-              </a:rPr>
-              <a:t>Training loss</a:t>
-            </a:r>
-          </a:p>
-        </p:txBody>
-      </p:sp>
-      <p:sp>
-        <p:nvSpPr>
-          <p:cNvPr id="104" name="TextBox 103"/>
-          <p:cNvSpPr txBox="1"/>
-          <p:nvPr/>
-        </p:nvSpPr>
-        <p:spPr>
-          <a:xfrm>
-            <a:off x="457200" y="5998464"/>
-            <a:ext cx="5120640" cy="237744"/>
-          </a:xfrm>
-          <a:prstGeom prst="rect">
-            <a:avLst/>
-          </a:prstGeom>
-          <a:noFill/>
-        </p:spPr>
-        <p:txBody>
-          <a:bodyPr wrap="square" anchor="ctr" lIns="0" rIns="0" tIns="0" bIns="0">
-            <a:spAutoFit/>
-          </a:bodyPr>
-          <a:lstStyle/>
-          <a:p>
-            <a:pPr algn="l"/>
-            <a:r>
-              <a:rPr sz="1000" b="0">
-                <a:solidFill>
-                  <a:srgbClr val="7C7D80"/>
-                </a:solidFill>
-                <a:latin typeface="Arial"/>
-              </a:rPr>
-              <a:t>d_model = 16  ·  4 heads  ·  3 layers  ·  T = 50 frames  ·  5 classes (A–E)</a:t>
             </a:r>
           </a:p>
         </p:txBody>
